--- a/presentation/microgrid_paper_progress_short.pptx
+++ b/presentation/microgrid_paper_progress_short.pptx
@@ -6163,8 +6163,8 @@
         </p:blipFill>
         <p:spPr>
           <a:xfrm>
-            <a:off x="640080" y="4754880"/>
-            <a:ext cx="5669280" cy="2267712"/>
+            <a:off x="822960" y="4663440"/>
+            <a:ext cx="3543300" cy="1417320"/>
           </a:xfrm>
           <a:prstGeom prst="rect">
             <a:avLst/>
@@ -6187,8 +6187,8 @@
         </p:blipFill>
         <p:spPr>
           <a:xfrm>
-            <a:off x="6583680" y="4572000"/>
-            <a:ext cx="5120640" cy="4480560"/>
+            <a:off x="8686800" y="4663440"/>
+            <a:ext cx="1619794" cy="1417320"/>
           </a:xfrm>
           <a:prstGeom prst="rect">
             <a:avLst/>

--- a/presentation/microgrid_paper_progress_short.pptx
+++ b/presentation/microgrid_paper_progress_short.pptx
@@ -3147,8 +3147,8 @@
         </p:nvSpPr>
         <p:spPr>
           <a:xfrm>
-            <a:off x="640080" y="2194560"/>
-            <a:ext cx="137160" cy="2560320"/>
+            <a:off x="640080" y="1554480"/>
+            <a:ext cx="137160" cy="3566160"/>
           </a:xfrm>
           <a:prstGeom prst="rect">
             <a:avLst/>
@@ -3190,8 +3190,8 @@
         </p:nvSpPr>
         <p:spPr>
           <a:xfrm>
-            <a:off x="914400" y="2103120"/>
-            <a:ext cx="10058400" cy="914400"/>
+            <a:off x="914400" y="1554480"/>
+            <a:ext cx="10515600" cy="1097280"/>
           </a:xfrm>
           <a:prstGeom prst="rect">
             <a:avLst/>
@@ -3206,7 +3206,7 @@
           <a:p>
             <a:pPr algn="l"/>
             <a:r>
-              <a:rPr sz="4800" b="1">
+              <a:rPr sz="5400" b="1">
                 <a:solidFill>
                   <a:srgbClr val="FFFFFF"/>
                 </a:solidFill>
@@ -3225,8 +3225,8 @@
         </p:nvSpPr>
         <p:spPr>
           <a:xfrm>
-            <a:off x="914400" y="3017520"/>
-            <a:ext cx="10058400" cy="731520"/>
+            <a:off x="914400" y="2697480"/>
+            <a:ext cx="10515600" cy="822960"/>
           </a:xfrm>
           <a:prstGeom prst="rect">
             <a:avLst/>
@@ -3241,7 +3241,7 @@
           <a:p>
             <a:pPr algn="l"/>
             <a:r>
-              <a:rPr sz="2600" b="0">
+              <a:rPr sz="3400" b="0">
                 <a:solidFill>
                   <a:srgbClr val="2A9D8F"/>
                 </a:solidFill>
@@ -3260,8 +3260,8 @@
         </p:nvSpPr>
         <p:spPr>
           <a:xfrm>
-            <a:off x="914400" y="3840480"/>
-            <a:ext cx="10058400" cy="457200"/>
+            <a:off x="914400" y="3611880"/>
+            <a:ext cx="10515600" cy="640080"/>
           </a:xfrm>
           <a:prstGeom prst="rect">
             <a:avLst/>
@@ -3276,13 +3276,13 @@
           <a:p>
             <a:pPr algn="l"/>
             <a:r>
-              <a:rPr sz="1700" b="0">
+              <a:rPr sz="2400" b="1">
                 <a:solidFill>
                   <a:srgbClr val="E9C46A"/>
                 </a:solidFill>
                 <a:latin typeface="Calibri"/>
               </a:rPr>
-              <a:t>Condensed progress report - CSE + EEE sides</a:t>
+              <a:t>Condensed progress report  -  CSE + EEE sides</a:t>
             </a:r>
           </a:p>
         </p:txBody>
@@ -3295,8 +3295,8 @@
         </p:nvSpPr>
         <p:spPr>
           <a:xfrm>
-            <a:off x="914400" y="4572000"/>
-            <a:ext cx="10058400" cy="457200"/>
+            <a:off x="914400" y="4480560"/>
+            <a:ext cx="10515600" cy="548640"/>
           </a:xfrm>
           <a:prstGeom prst="rect">
             <a:avLst/>
@@ -3311,7 +3311,7 @@
           <a:p>
             <a:pPr algn="l"/>
             <a:r>
-              <a:rPr sz="1400" b="0">
+              <a:rPr sz="1900" b="0">
                 <a:solidFill>
                   <a:srgbClr val="F4F1DE"/>
                 </a:solidFill>
@@ -3331,7 +3331,7 @@
         <p:spPr>
           <a:xfrm>
             <a:off x="914400" y="5943600"/>
-            <a:ext cx="10058400" cy="365760"/>
+            <a:ext cx="10515600" cy="457200"/>
           </a:xfrm>
           <a:prstGeom prst="rect">
             <a:avLst/>
@@ -3346,9 +3346,9 @@
           <a:p>
             <a:pPr algn="l"/>
             <a:r>
-              <a:rPr sz="1300" b="0">
-                <a:solidFill>
-                  <a:srgbClr val="606060"/>
+              <a:rPr sz="1700" b="0">
+                <a:solidFill>
+                  <a:srgbClr val="E9C46A"/>
                 </a:solidFill>
                 <a:latin typeface="Consolas"/>
               </a:rPr>
